--- a/folien/01-netzwerke-grundlagen.pptx
+++ b/folien/01-netzwerke-grundlagen.pptx
@@ -3636,7 +3636,7 @@
       </p:grpSpPr>
       <p:pic>
         <p:nvPicPr>
-          <p:cNvPr id="2" name="Image 0" descr="/Users/jacobmenge/Desktop/kurs-unterlagen/folien/assets/icons/cloudhelden.png">    </p:cNvPr>
+          <p:cNvPr id="2" name="Image 0" descr="/Users/jacobmenge/Desktop/kurs-26.2b-orga/folienwerkstatt/assets/icons/cloudhelden.png">    </p:cNvPr>
           <p:cNvPicPr>
             <a:picLocks noChangeAspect="1"/>
           </p:cNvPicPr>
@@ -4198,7 +4198,7 @@
       </p:sp>
       <p:pic>
         <p:nvPicPr>
-          <p:cNvPr id="5" name="Image 0" descr="/Users/jacobmenge/Desktop/kurs-unterlagen/folien/assets/diagramme/topologien.png">    </p:cNvPr>
+          <p:cNvPr id="5" name="Image 0" descr="/Users/jacobmenge/Desktop/kurs-26.2b-orga/folienwerkstatt/assets/diagramme/topologien.png">    </p:cNvPr>
           <p:cNvPicPr>
             <a:picLocks noChangeAspect="1"/>
           </p:cNvPicPr>
@@ -4574,7 +4574,7 @@
       </p:sp>
       <p:pic>
         <p:nvPicPr>
-          <p:cNvPr id="5" name="Image 0" descr="/Users/jacobmenge/Desktop/kurs-unterlagen/folien/assets/diagramme/topologien.png">    </p:cNvPr>
+          <p:cNvPr id="5" name="Image 0" descr="/Users/jacobmenge/Desktop/kurs-26.2b-orga/folienwerkstatt/assets/diagramme/topologien.png">    </p:cNvPr>
           <p:cNvPicPr>
             <a:picLocks noChangeAspect="1"/>
           </p:cNvPicPr>
@@ -4960,7 +4960,7 @@
       </p:sp>
       <p:pic>
         <p:nvPicPr>
-          <p:cNvPr id="5" name="Image 0" descr="/Users/jacobmenge/Desktop/kurs-unterlagen/folien/assets/diagramme/topologien.png">    </p:cNvPr>
+          <p:cNvPr id="5" name="Image 0" descr="/Users/jacobmenge/Desktop/kurs-26.2b-orga/folienwerkstatt/assets/diagramme/topologien.png">    </p:cNvPr>
           <p:cNvPicPr>
             <a:picLocks noChangeAspect="1"/>
           </p:cNvPicPr>
@@ -5477,7 +5477,7 @@
       </p:sp>
       <p:pic>
         <p:nvPicPr>
-          <p:cNvPr id="5" name="Image 0" descr="/Users/jacobmenge/Desktop/kurs-unterlagen/folien/assets/diagramme/topologien.png">    </p:cNvPr>
+          <p:cNvPr id="5" name="Image 0" descr="/Users/jacobmenge/Desktop/kurs-26.2b-orga/folienwerkstatt/assets/diagramme/topologien.png">    </p:cNvPr>
           <p:cNvPicPr>
             <a:picLocks noChangeAspect="1"/>
           </p:cNvPicPr>
@@ -6125,7 +6125,7 @@
       </p:sp>
       <p:pic>
         <p:nvPicPr>
-          <p:cNvPr id="5" name="Image 0" descr="/Users/jacobmenge/Desktop/kurs-unterlagen/folien/assets/diagramme/topologien.png">    </p:cNvPr>
+          <p:cNvPr id="5" name="Image 0" descr="/Users/jacobmenge/Desktop/kurs-26.2b-orga/folienwerkstatt/assets/diagramme/topologien.png">    </p:cNvPr>
           <p:cNvPicPr>
             <a:picLocks noChangeAspect="1"/>
           </p:cNvPicPr>
@@ -7728,7 +7728,7 @@
       </p:sp>
       <p:pic>
         <p:nvPicPr>
-          <p:cNvPr id="28" name="Image 0" descr="/Users/jacobmenge/Desktop/kurs-unterlagen/folien/assets/diagramme/dateneinheiten.png">    </p:cNvPr>
+          <p:cNvPr id="28" name="Image 0" descr="/Users/jacobmenge/Desktop/kurs-26.2b-orga/folienwerkstatt/assets/diagramme/dateneinheiten.png">    </p:cNvPr>
           <p:cNvPicPr>
             <a:picLocks noChangeAspect="1"/>
           </p:cNvPicPr>
@@ -8042,7 +8042,7 @@
       </p:sp>
       <p:pic>
         <p:nvPicPr>
-          <p:cNvPr id="5" name="Image 0" descr="/Users/jacobmenge/Desktop/kurs-unterlagen/folien/assets/diagramme/bandbreite-latenz.png">    </p:cNvPr>
+          <p:cNvPr id="5" name="Image 0" descr="/Users/jacobmenge/Desktop/kurs-26.2b-orga/folienwerkstatt/assets/diagramme/bandbreite-latenz.png">    </p:cNvPr>
           <p:cNvPicPr>
             <a:picLocks noChangeAspect="1"/>
           </p:cNvPicPr>
@@ -10452,7 +10452,7 @@
       </p:sp>
       <p:pic>
         <p:nvPicPr>
-          <p:cNvPr id="5" name="Image 0" descr="/Users/jacobmenge/Desktop/kurs-unterlagen/folien/assets/diagramme/osi-tcpip.png">    </p:cNvPr>
+          <p:cNvPr id="5" name="Image 0" descr="/Users/jacobmenge/Desktop/kurs-26.2b-orga/folienwerkstatt/assets/diagramme/osi-tcpip.png">    </p:cNvPr>
           <p:cNvPicPr>
             <a:picLocks noChangeAspect="1"/>
           </p:cNvPicPr>
@@ -10766,7 +10766,7 @@
       </p:sp>
       <p:pic>
         <p:nvPicPr>
-          <p:cNvPr id="5" name="Image 0" descr="/Users/jacobmenge/Desktop/kurs-unterlagen/folien/assets/diagramme/kapselung.png">    </p:cNvPr>
+          <p:cNvPr id="5" name="Image 0" descr="/Users/jacobmenge/Desktop/kurs-26.2b-orga/folienwerkstatt/assets/diagramme/kapselung.png">    </p:cNvPr>
           <p:cNvPicPr>
             <a:picLocks noChangeAspect="1"/>
           </p:cNvPicPr>
@@ -11080,7 +11080,7 @@
       </p:sp>
       <p:pic>
         <p:nvPicPr>
-          <p:cNvPr id="5" name="Image 0" descr="/Users/jacobmenge/Desktop/kurs-unterlagen/folien/assets/diagramme/diagnose-leiter.png">    </p:cNvPr>
+          <p:cNvPr id="5" name="Image 0" descr="/Users/jacobmenge/Desktop/kurs-26.2b-orga/folienwerkstatt/assets/diagramme/diagnose-leiter.png">    </p:cNvPr>
           <p:cNvPicPr>
             <a:picLocks noChangeAspect="1"/>
           </p:cNvPicPr>
@@ -17661,7 +17661,7 @@
       </p:sp>
       <p:pic>
         <p:nvPicPr>
-          <p:cNvPr id="6" name="Image 0" descr="/Users/jacobmenge/Desktop/kurs-unterlagen/folien/assets/diagramme/weg-thema1.png">    </p:cNvPr>
+          <p:cNvPr id="6" name="Image 0" descr="/Users/jacobmenge/Desktop/kurs-26.2b-orga/folienwerkstatt/assets/diagramme/weg-thema1.png">    </p:cNvPr>
           <p:cNvPicPr>
             <a:picLocks noChangeAspect="1"/>
           </p:cNvPicPr>
@@ -18955,7 +18955,7 @@
       </p:sp>
       <p:pic>
         <p:nvPicPr>
-          <p:cNvPr id="8" name="Image 0" descr="/Users/jacobmenge/Desktop/kurs-unterlagen/folien/assets/diagramme/icon-standort-3843AF.png">    </p:cNvPr>
+          <p:cNvPr id="8" name="Image 0" descr="/Users/jacobmenge/Desktop/kurs-26.2b-orga/folienwerkstatt/assets/diagramme/icon-standort-3843AF.png">    </p:cNvPr>
           <p:cNvPicPr>
             <a:picLocks noChangeAspect="1"/>
           </p:cNvPicPr>
@@ -19100,7 +19100,7 @@
       </p:sp>
       <p:pic>
         <p:nvPicPr>
-          <p:cNvPr id="13" name="Image 1" descr="/Users/jacobmenge/Desktop/kurs-unterlagen/folien/assets/diagramme/icon-anlage-0F7C86.png">    </p:cNvPr>
+          <p:cNvPr id="13" name="Image 1" descr="/Users/jacobmenge/Desktop/kurs-26.2b-orga/folienwerkstatt/assets/diagramme/icon-anlage-0F7C86.png">    </p:cNvPr>
           <p:cNvPicPr>
             <a:picLocks noChangeAspect="1"/>
           </p:cNvPicPr>
@@ -19245,7 +19245,7 @@
       </p:sp>
       <p:pic>
         <p:nvPicPr>
-          <p:cNvPr id="18" name="Image 2" descr="/Users/jacobmenge/Desktop/kurs-unterlagen/folien/assets/diagramme/icon-cloud-9A6310.png">    </p:cNvPr>
+          <p:cNvPr id="18" name="Image 2" descr="/Users/jacobmenge/Desktop/kurs-26.2b-orga/folienwerkstatt/assets/diagramme/icon-cloud-9A6310.png">    </p:cNvPr>
           <p:cNvPicPr>
             <a:picLocks noChangeAspect="1"/>
           </p:cNvPicPr>
